--- a/03_Data_Analysis/Sprint_08/Unidad_02_Visualizacion_Avanzada_Seaborn/03_Practica_Obligatoria/titanic_analisis.pptx
+++ b/03_Data_Analysis/Sprint_08/Unidad_02_Visualizacion_Avanzada_Seaborn/03_Practica_Obligatoria/titanic_analisis.pptx
@@ -3277,7 +3277,29 @@
                 <a:ea typeface="Calibri" pitchFamily="34" charset="-122"/>
                 <a:cs typeface="Calibri" pitchFamily="34" charset="-120"/>
               </a:rPr>
-              <a:t>Cherbourg tiene la mayor tasa de supervivencia (55.4%) — porque embarcó proporcionalmente más pasajeros de 1ª clase (54%).</a:t>
+              <a:t>Cherbourg tiene la mayor tasa de supervivencia (55.4%) — porque embarcó proporcionalmente más pasajeros de 1ª clase (</a:t>
+            </a:r>
+            <a:r>
+              <a:rPr lang="en-US" sz="1200" i="1">
+                <a:solidFill>
+                  <a:srgbClr val="8FA8C0"/>
+                </a:solidFill>
+                <a:latin typeface="Calibri" pitchFamily="34" charset="0"/>
+                <a:ea typeface="Calibri" pitchFamily="34" charset="-122"/>
+                <a:cs typeface="Calibri" pitchFamily="34" charset="-120"/>
+              </a:rPr>
+              <a:t>54</a:t>
+            </a:r>
+            <a:r>
+              <a:rPr lang="en-US" sz="1200" i="1" smtClean="0">
+                <a:solidFill>
+                  <a:srgbClr val="8FA8C0"/>
+                </a:solidFill>
+                <a:latin typeface="Calibri" pitchFamily="34" charset="0"/>
+                <a:ea typeface="Calibri" pitchFamily="34" charset="-122"/>
+                <a:cs typeface="Calibri" pitchFamily="34" charset="-120"/>
+              </a:rPr>
+              <a:t>%)</a:t>
             </a:r>
             <a:endParaRPr lang="en-US" sz="1200" dirty="0"/>
           </a:p>
